--- a/SPRING BOOT/spring_boot_actuator.pptx
+++ b/SPRING BOOT/spring_boot_actuator.pptx
@@ -322,7 +322,7 @@
           <a:p>
             <a:fld id="{5BCAD085-E8A6-8845-BD4E-CB4CCA059FC4}" type="datetimeFigureOut">
               <a:rPr lang="en-US" smtClean="0"/>
-              <a:t>3/27/2026</a:t>
+              <a:t>3/29/2026</a:t>
             </a:fld>
             <a:endParaRPr lang="en-US"/>
           </a:p>
@@ -490,7 +490,7 @@
           <a:p>
             <a:fld id="{5BCAD085-E8A6-8845-BD4E-CB4CCA059FC4}" type="datetimeFigureOut">
               <a:rPr lang="en-US" smtClean="0"/>
-              <a:t>3/27/2026</a:t>
+              <a:t>3/29/2026</a:t>
             </a:fld>
             <a:endParaRPr lang="en-US"/>
           </a:p>
@@ -668,7 +668,7 @@
           <a:p>
             <a:fld id="{5BCAD085-E8A6-8845-BD4E-CB4CCA059FC4}" type="datetimeFigureOut">
               <a:rPr lang="en-US" smtClean="0"/>
-              <a:t>3/27/2026</a:t>
+              <a:t>3/29/2026</a:t>
             </a:fld>
             <a:endParaRPr lang="en-US"/>
           </a:p>
@@ -836,7 +836,7 @@
           <a:p>
             <a:fld id="{5BCAD085-E8A6-8845-BD4E-CB4CCA059FC4}" type="datetimeFigureOut">
               <a:rPr lang="en-US" smtClean="0"/>
-              <a:t>3/27/2026</a:t>
+              <a:t>3/29/2026</a:t>
             </a:fld>
             <a:endParaRPr lang="en-US"/>
           </a:p>
@@ -1081,7 +1081,7 @@
           <a:p>
             <a:fld id="{5BCAD085-E8A6-8845-BD4E-CB4CCA059FC4}" type="datetimeFigureOut">
               <a:rPr lang="en-US" smtClean="0"/>
-              <a:t>3/27/2026</a:t>
+              <a:t>3/29/2026</a:t>
             </a:fld>
             <a:endParaRPr lang="en-US"/>
           </a:p>
@@ -1366,7 +1366,7 @@
           <a:p>
             <a:fld id="{5BCAD085-E8A6-8845-BD4E-CB4CCA059FC4}" type="datetimeFigureOut">
               <a:rPr lang="en-US" smtClean="0"/>
-              <a:t>3/27/2026</a:t>
+              <a:t>3/29/2026</a:t>
             </a:fld>
             <a:endParaRPr lang="en-US"/>
           </a:p>
@@ -1785,7 +1785,7 @@
           <a:p>
             <a:fld id="{5BCAD085-E8A6-8845-BD4E-CB4CCA059FC4}" type="datetimeFigureOut">
               <a:rPr lang="en-US" smtClean="0"/>
-              <a:t>3/27/2026</a:t>
+              <a:t>3/29/2026</a:t>
             </a:fld>
             <a:endParaRPr lang="en-US"/>
           </a:p>
@@ -1902,7 +1902,7 @@
           <a:p>
             <a:fld id="{5BCAD085-E8A6-8845-BD4E-CB4CCA059FC4}" type="datetimeFigureOut">
               <a:rPr lang="en-US" smtClean="0"/>
-              <a:t>3/27/2026</a:t>
+              <a:t>3/29/2026</a:t>
             </a:fld>
             <a:endParaRPr lang="en-US"/>
           </a:p>
@@ -1997,7 +1997,7 @@
           <a:p>
             <a:fld id="{5BCAD085-E8A6-8845-BD4E-CB4CCA059FC4}" type="datetimeFigureOut">
               <a:rPr lang="en-US" smtClean="0"/>
-              <a:t>3/27/2026</a:t>
+              <a:t>3/29/2026</a:t>
             </a:fld>
             <a:endParaRPr lang="en-US"/>
           </a:p>
@@ -2272,7 +2272,7 @@
           <a:p>
             <a:fld id="{5BCAD085-E8A6-8845-BD4E-CB4CCA059FC4}" type="datetimeFigureOut">
               <a:rPr lang="en-US" smtClean="0"/>
-              <a:t>3/27/2026</a:t>
+              <a:t>3/29/2026</a:t>
             </a:fld>
             <a:endParaRPr lang="en-US"/>
           </a:p>
@@ -2524,7 +2524,7 @@
           <a:p>
             <a:fld id="{5BCAD085-E8A6-8845-BD4E-CB4CCA059FC4}" type="datetimeFigureOut">
               <a:rPr lang="en-US" smtClean="0"/>
-              <a:t>3/27/2026</a:t>
+              <a:t>3/29/2026</a:t>
             </a:fld>
             <a:endParaRPr lang="en-US"/>
           </a:p>
@@ -2735,7 +2735,7 @@
           <a:p>
             <a:fld id="{5BCAD085-E8A6-8845-BD4E-CB4CCA059FC4}" type="datetimeFigureOut">
               <a:rPr lang="en-US" smtClean="0"/>
-              <a:t>3/27/2026</a:t>
+              <a:t>3/29/2026</a:t>
             </a:fld>
             <a:endParaRPr lang="en-US"/>
           </a:p>
@@ -4002,34 +4002,85 @@
           </a:bodyPr>
           <a:lstStyle/>
           <a:p>
-            <a:pPr marL="0" indent="0">
-              <a:buNone/>
-            </a:pPr>
-            <a:r>
-              <a:rPr sz="1600" i="1" dirty="0"/>
+            <a:r>
+              <a:rPr lang="en-IN" sz="1600" dirty="0"/>
               <a:t>&lt;dependency&gt;</a:t>
             </a:r>
-          </a:p>
-          <a:p>
-            <a:pPr marL="0" indent="0">
-              <a:buNone/>
-            </a:pPr>
-            <a:r>
-              <a:rPr sz="1600" i="1" dirty="0"/>
-              <a:t> </a:t>
-            </a:r>
-            <a:r>
-              <a:rPr sz="1600" i="1" dirty="0" err="1"/>
-              <a:t>io.micrometer:micrometer-registry-prometheus</a:t>
-            </a:r>
-            <a:endParaRPr sz="1600" i="1" dirty="0"/>
-          </a:p>
-          <a:p>
-            <a:pPr marL="0" indent="0">
-              <a:buNone/>
-            </a:pPr>
-            <a:r>
-              <a:rPr sz="1600" i="1" dirty="0"/>
+            <a:br>
+              <a:rPr lang="en-IN" sz="1600" dirty="0"/>
+            </a:br>
+            <a:r>
+              <a:rPr lang="en-IN" sz="1600" dirty="0"/>
+              <a:t>    &lt;</a:t>
+            </a:r>
+            <a:r>
+              <a:rPr lang="en-IN" sz="1600" dirty="0" err="1"/>
+              <a:t>groupId</a:t>
+            </a:r>
+            <a:r>
+              <a:rPr lang="en-IN" sz="1600" dirty="0"/>
+              <a:t>&gt;</a:t>
+            </a:r>
+            <a:r>
+              <a:rPr lang="en-IN" sz="1600" dirty="0" err="1"/>
+              <a:t>io.micrometer</a:t>
+            </a:r>
+            <a:r>
+              <a:rPr lang="en-IN" sz="1600" dirty="0"/>
+              <a:t>&lt;/</a:t>
+            </a:r>
+            <a:r>
+              <a:rPr lang="en-IN" sz="1600" dirty="0" err="1"/>
+              <a:t>groupId</a:t>
+            </a:r>
+            <a:r>
+              <a:rPr lang="en-IN" sz="1600" dirty="0"/>
+              <a:t>&gt;</a:t>
+            </a:r>
+            <a:br>
+              <a:rPr lang="en-IN" sz="1600" dirty="0"/>
+            </a:br>
+            <a:r>
+              <a:rPr lang="en-IN" sz="1600" dirty="0"/>
+              <a:t>    &lt;</a:t>
+            </a:r>
+            <a:r>
+              <a:rPr lang="en-IN" sz="1600" dirty="0" err="1"/>
+              <a:t>artifactId</a:t>
+            </a:r>
+            <a:r>
+              <a:rPr lang="en-IN" sz="1600" dirty="0"/>
+              <a:t>&gt;</a:t>
+            </a:r>
+            <a:r>
+              <a:rPr lang="en-IN" sz="1600" dirty="0" err="1"/>
+              <a:t>micrometer</a:t>
+            </a:r>
+            <a:r>
+              <a:rPr lang="en-IN" sz="1600" dirty="0"/>
+              <a:t>-registry-</a:t>
+            </a:r>
+            <a:r>
+              <a:rPr lang="en-IN" sz="1600" dirty="0" err="1"/>
+              <a:t>prometheus</a:t>
+            </a:r>
+            <a:r>
+              <a:rPr lang="en-IN" sz="1600" dirty="0"/>
+              <a:t>&lt;/</a:t>
+            </a:r>
+            <a:r>
+              <a:rPr lang="en-IN" sz="1600" dirty="0" err="1"/>
+              <a:t>artifactId</a:t>
+            </a:r>
+            <a:r>
+              <a:rPr lang="en-IN" sz="1600" dirty="0"/>
+              <a:t>&gt;</a:t>
+            </a:r>
+            <a:br>
+              <a:rPr lang="en-IN" sz="1600" dirty="0"/>
+            </a:br>
+            <a:r>
+              <a:rPr lang="en-IN" sz="1600" dirty="0"/>
               <a:t>&lt;/dependency&gt;</a:t>
             </a:r>
           </a:p>
